--- a/docs/eic/EIC_STEP1_PITCH_DECK.pptx
+++ b/docs/eic/EIC_STEP1_PITCH_DECK.pptx
@@ -6522,7 +6522,7 @@
                 </a:solidFill>
                 <a:latin typeface="Arial"/>
               </a:rPr>
-              <a:t>Scientific anchoring: </a:t>
+              <a:t>Academic anchoring: </a:t>
             </a:r>
             <a:r>
               <a:rPr sz="2000" b="1" i="0">
@@ -6540,7 +6540,7 @@
                 </a:solidFill>
                 <a:latin typeface="Arial"/>
               </a:rPr>
-              <a:t> + </a:t>
+              <a:t> (quantum-safe/PhD) · </a:t>
             </a:r>
             <a:r>
               <a:rPr sz="2000" b="1" i="0">
@@ -6549,7 +6549,7 @@
                 </a:solidFill>
                 <a:latin typeface="Arial"/>
               </a:rPr>
-              <a:t>KTH (TECoSA)</a:t>
+              <a:t>KTH TECoSA</a:t>
             </a:r>
             <a:r>
               <a:rPr sz="2000" b="0" i="0">
@@ -6558,7 +6558,25 @@
                 </a:solidFill>
                 <a:latin typeface="Arial"/>
               </a:rPr>
-              <a:t>. </a:t>
+              <a:t> (safety) · </a:t>
+            </a:r>
+            <a:r>
+              <a:rPr sz="2000" b="1" i="0">
+                <a:solidFill>
+                  <a:srgbClr val="FFFFFF"/>
+                </a:solidFill>
+                <a:latin typeface="Arial"/>
+              </a:rPr>
+              <a:t>Metropolia</a:t>
+            </a:r>
+            <a:r>
+              <a:rPr sz="2000" b="0" i="0">
+                <a:solidFill>
+                  <a:srgbClr val="EAF1FB"/>
+                </a:solidFill>
+                <a:latin typeface="Arial"/>
+              </a:rPr>
+              <a:t> (talent, 5/5 master's). </a:t>
             </a:r>
             <a:r>
               <a:rPr sz="2000" b="1" i="0">

--- a/docs/eic/EIC_STEP1_PITCH_DECK.pptx
+++ b/docs/eic/EIC_STEP1_PITCH_DECK.pptx
@@ -3241,7 +3241,7 @@
         <p:spPr>
           <a:xfrm>
             <a:off x="640080" y="4297680"/>
-            <a:ext cx="10515600" cy="1463040"/>
+            <a:ext cx="10515600" cy="1280160"/>
           </a:xfrm>
           <a:prstGeom prst="rect">
             <a:avLst/>
@@ -3269,6 +3269,40 @@
       <p:sp>
         <p:nvSpPr>
           <p:cNvPr id="6" name="TextBox 5"/>
+          <p:cNvSpPr txBox="1"/>
+          <p:nvPr/>
+        </p:nvSpPr>
+        <p:spPr>
+          <a:xfrm>
+            <a:off x="640080" y="5623560"/>
+            <a:ext cx="10972800" cy="548640"/>
+          </a:xfrm>
+          <a:prstGeom prst="rect">
+            <a:avLst/>
+          </a:prstGeom>
+          <a:noFill/>
+        </p:spPr>
+        <p:txBody>
+          <a:bodyPr wrap="square" anchor="t">
+            <a:spAutoFit/>
+          </a:bodyPr>
+          <a:lstStyle/>
+          <a:p>
+            <a:r>
+              <a:rPr sz="1300" b="1" i="0">
+                <a:solidFill>
+                  <a:srgbClr val="E8B64C"/>
+                </a:solidFill>
+                <a:latin typeface="Arial"/>
+              </a:rPr>
+              <a:t>NVIDIA Connect ISV Partner    ·    IBM Business Partner    ·    Amazon (AWS) Consulting Partner</a:t>
+            </a:r>
+          </a:p>
+        </p:txBody>
+      </p:sp>
+      <p:sp>
+        <p:nvSpPr>
+          <p:cNvPr id="7" name="TextBox 6"/>
           <p:cNvSpPr txBox="1"/>
           <p:nvPr/>
         </p:nvSpPr>

--- a/docs/eic/EIC_STEP1_PITCH_DECK.pptx
+++ b/docs/eic/EIC_STEP1_PITCH_DECK.pptx
@@ -3177,7 +3177,7 @@
                 </a:solidFill>
                 <a:latin typeface="Arial"/>
               </a:rPr>
-              <a:t>LIFETIME OY · ESPOO, FINLAND · EIC ACCELERATOR OPEN</a:t>
+              <a:t>LIFETIME OY · ESPOO, FINLAND · EIC ACCELERATOR</a:t>
             </a:r>
           </a:p>
         </p:txBody>

--- a/docs/eic/EIC_STEP1_PITCH_DECK.pptx
+++ b/docs/eic/EIC_STEP1_PITCH_DECK.pptx
@@ -3261,7 +3261,7 @@
                 </a:solidFill>
                 <a:latin typeface="Arial"/>
               </a:rPr>
-              <a:t>DWS IQ on the customer's own NVIDIA DGX — data and model weights never leave the building.  €2.5M grant-only · TRL 6→8.</a:t>
+              <a:t>KYA — Know Your Agent — running in production. Aegis, the sovereign dual-use tier, GA September 2026.  €2.5M grant-only · TRL 5→8.</a:t>
             </a:r>
           </a:p>
         </p:txBody>
@@ -3480,7 +3480,7 @@
                 </a:solidFill>
                 <a:latin typeface="Arial"/>
               </a:rPr>
-              <a:t>€2.5M grant-only · 24 months · TRL 6→8</a:t>
+              <a:t>€2.5M grant-only · 24 months · TRL 5→8</a:t>
             </a:r>
           </a:p>
         </p:txBody>
@@ -4060,7 +4060,7 @@
                 </a:solidFill>
                 <a:latin typeface="Arial"/>
               </a:rPr>
-              <a:t>Aug 2027</a:t>
+              <a:t>Dec 2027</a:t>
             </a:r>
             <a:r>
               <a:rPr sz="2000" b="0" i="0">
@@ -4215,7 +4215,7 @@
                 </a:solidFill>
                 <a:latin typeface="Arial"/>
               </a:rPr>
-              <a:t>THE SOLUTION · LIVE TODAY</a:t>
+              <a:t>THE SOLUTION · KYA RUNNING IN PRODUCTION</a:t>
             </a:r>
           </a:p>
         </p:txBody>
@@ -4305,7 +4305,7 @@
                 </a:solidFill>
                 <a:latin typeface="Arial"/>
               </a:rPr>
-              <a:t>50 production agents</a:t>
+              <a:t>KYA — Know Your Agent:</a:t>
             </a:r>
             <a:r>
               <a:rPr sz="2000" b="0" i="0">
@@ -4314,7 +4314,16 @@
                 </a:solidFill>
                 <a:latin typeface="Arial"/>
               </a:rPr>
-              <a:t>, 25 regulated industries.</a:t>
+              <a:t> identity binding · live trust score · Leash Snap revocation · Article-12 audit. </a:t>
+            </a:r>
+            <a:r>
+              <a:rPr sz="2000" b="1" i="0">
+                <a:solidFill>
+                  <a:srgbClr val="FFFFFF"/>
+                </a:solidFill>
+                <a:latin typeface="Arial"/>
+              </a:rPr>
+              <a:t>Running today.</a:t>
             </a:r>
           </a:p>
           <a:p>
@@ -4342,7 +4351,7 @@
                 </a:solidFill>
                 <a:latin typeface="Arial"/>
               </a:rPr>
-              <a:t>Runs on the customer's </a:t>
+              <a:t>Agent fleet across the </a:t>
             </a:r>
             <a:r>
               <a:rPr sz="2000" b="1" i="0">
@@ -4351,7 +4360,7 @@
                 </a:solidFill>
                 <a:latin typeface="Arial"/>
               </a:rPr>
-              <a:t>own NVIDIA DGX</a:t>
+              <a:t>21 EU-regulated dual-use industries</a:t>
             </a:r>
             <a:r>
               <a:rPr sz="2000" b="0" i="0">
@@ -4360,25 +4369,7 @@
                 </a:solidFill>
                 <a:latin typeface="Arial"/>
               </a:rPr>
-              <a:t> — sovereignty by </a:t>
-            </a:r>
-            <a:r>
-              <a:rPr sz="2000" b="1" i="0">
-                <a:solidFill>
-                  <a:srgbClr val="FFFFFF"/>
-                </a:solidFill>
-                <a:latin typeface="Arial"/>
-              </a:rPr>
-              <a:t>physics, not policy</a:t>
-            </a:r>
-            <a:r>
-              <a:rPr sz="2000" b="0" i="0">
-                <a:solidFill>
-                  <a:srgbClr val="EAF1FB"/>
-                </a:solidFill>
-                <a:latin typeface="Arial"/>
-              </a:rPr>
-              <a:t>.</a:t>
+              <a:t> in Aegis scope (25 platform-wide).</a:t>
             </a:r>
           </a:p>
           <a:p>
@@ -4406,7 +4397,7 @@
                 </a:solidFill>
                 <a:latin typeface="Arial"/>
               </a:rPr>
-              <a:t>KYA engine: </a:t>
+              <a:t>Runs on the customer's </a:t>
             </a:r>
             <a:r>
               <a:rPr sz="2000" b="1" i="0">
@@ -4415,7 +4406,7 @@
                 </a:solidFill>
                 <a:latin typeface="Arial"/>
               </a:rPr>
-              <a:t>identity · live trust score · Leash Snap revocation · Article-12 audit</a:t>
+              <a:t>own NVIDIA DGX</a:t>
             </a:r>
             <a:r>
               <a:rPr sz="2000" b="0" i="0">
@@ -4424,7 +4415,7 @@
                 </a:solidFill>
                 <a:latin typeface="Arial"/>
               </a:rPr>
-              <a:t>.</a:t>
+              <a:t> — on-prem, weights stay on customer hardware.</a:t>
             </a:r>
           </a:p>
           <a:p>
@@ -4452,7 +4443,7 @@
                 </a:solidFill>
                 <a:latin typeface="Arial"/>
               </a:rPr>
-              <a:t>6 paying customers · €7k MRR · 100% retention</a:t>
+              <a:t>Aegis GA September 2026</a:t>
             </a:r>
             <a:r>
               <a:rPr sz="2000" b="0" i="0">
@@ -4461,7 +4452,7 @@
                 </a:solidFill>
                 <a:latin typeface="Arial"/>
               </a:rPr>
-              <a:t> since first paid deployment.</a:t>
+              <a:t> — pre-revenue today. The grant funds the leap.</a:t>
             </a:r>
           </a:p>
         </p:txBody>
@@ -5116,7 +5107,7 @@
                 </a:solidFill>
                 <a:latin typeface="Arial"/>
               </a:rPr>
-              <a:t>Aug 2027</a:t>
+              <a:t>Dec 2027</a:t>
             </a:r>
             <a:r>
               <a:rPr sz="2000" b="0" i="0">
@@ -5881,7 +5872,34 @@
                 </a:solidFill>
                 <a:latin typeface="Arial"/>
               </a:rPr>
-              <a:t>€7k MRR · 100% retention · roadmap to €60k MRR.</a:t>
+              <a:t>Cash break-even</a:t>
+            </a:r>
+            <a:r>
+              <a:rPr sz="2000" b="0" i="0">
+                <a:solidFill>
+                  <a:srgbClr val="EAF1FB"/>
+                </a:solidFill>
+                <a:latin typeface="Arial"/>
+              </a:rPr>
+              <a:t> on founder transport + consulting revenue; </a:t>
+            </a:r>
+            <a:r>
+              <a:rPr sz="2000" b="1" i="0">
+                <a:solidFill>
+                  <a:srgbClr val="FFFFFF"/>
+                </a:solidFill>
+                <a:latin typeface="Arial"/>
+              </a:rPr>
+              <a:t>2 enterprise pilots contracted Q1/26</a:t>
+            </a:r>
+            <a:r>
+              <a:rPr sz="2000" b="0" i="0">
+                <a:solidFill>
+                  <a:srgbClr val="EAF1FB"/>
+                </a:solidFill>
+                <a:latin typeface="Arial"/>
+              </a:rPr>
+              <a:t>; Outokumpu + Kemira offers filed.</a:t>
             </a:r>
           </a:p>
           <a:p>
@@ -6163,7 +6181,7 @@
                 </a:solidFill>
                 <a:latin typeface="Arial"/>
               </a:rPr>
-              <a:t>EU-sovereign × agent-native × compliance-native × in-production</a:t>
+              <a:t>EU-sovereign × agent-native × compliance-native × dual-use</a:t>
             </a:r>
             <a:r>
               <a:rPr sz="2000" b="0" i="0">
@@ -6491,7 +6509,7 @@
                 </a:solidFill>
                 <a:latin typeface="Arial"/>
               </a:rPr>
-              <a:t> — Founder &amp; CEO; architect of DWS IQ + KYA; NVIDIA/IBM/AWS partner; LUT doctoral candidate.</a:t>
+              <a:t> — Founder &amp; CEO; architect of DWS IQ + KYA; NVIDIA/IBM/AWS partner; doctoral discussions with LUT.</a:t>
             </a:r>
           </a:p>
           <a:p>
@@ -6574,7 +6592,7 @@
                 </a:solidFill>
                 <a:latin typeface="Arial"/>
               </a:rPr>
-              <a:t> (quantum-safe/PhD) · </a:t>
+              <a:t> (quantum-safe KYA research) · </a:t>
             </a:r>
             <a:r>
               <a:rPr sz="2000" b="1" i="0">
@@ -6592,7 +6610,7 @@
                 </a:solidFill>
                 <a:latin typeface="Arial"/>
               </a:rPr>
-              <a:t> (safety) · </a:t>
+              <a:t> (safety assurance) · </a:t>
             </a:r>
             <a:r>
               <a:rPr sz="2000" b="1" i="0">
@@ -6650,13 +6668,22 @@
               <a:t>▪  </a:t>
             </a:r>
             <a:r>
+              <a:rPr sz="2000" b="1" i="0">
+                <a:solidFill>
+                  <a:srgbClr val="FFFFFF"/>
+                </a:solidFill>
+                <a:latin typeface="Arial"/>
+              </a:rPr>
+              <a:t>Two-person core</a:t>
+            </a:r>
+            <a:r>
               <a:rPr sz="2000" b="0" i="0">
                 <a:solidFill>
                   <a:srgbClr val="EAF1FB"/>
                 </a:solidFill>
                 <a:latin typeface="Arial"/>
               </a:rPr>
-              <a:t>Team includes women and men across engineering, product, and operations.</a:t>
+              <a:t> + contracted engineering bench under NDA + our own agent fleet. Grant funds the key hires.</a:t>
             </a:r>
           </a:p>
         </p:txBody>

--- a/docs/eic/EIC_STEP1_PITCH_DECK.pptx
+++ b/docs/eic/EIC_STEP1_PITCH_DECK.pptx
@@ -5899,7 +5899,7 @@
                 </a:solidFill>
                 <a:latin typeface="Arial"/>
               </a:rPr>
-              <a:t>; Outokumpu + Kemira offers filed.</a:t>
+              <a:t>; Outokumpu + Kemira in discussion.</a:t>
             </a:r>
           </a:p>
           <a:p>

--- a/docs/eic/EIC_STEP1_PITCH_DECK.pptx
+++ b/docs/eic/EIC_STEP1_PITCH_DECK.pptx
@@ -6509,7 +6509,7 @@
                 </a:solidFill>
                 <a:latin typeface="Arial"/>
               </a:rPr>
-              <a:t> — Founder &amp; CEO; architect of DWS IQ + KYA; NVIDIA/IBM/AWS partner; doctoral discussions with LUT.</a:t>
+              <a:t> — Founder &amp; CEO; architect of DWS IQ + KYA; NVIDIA/IBM/AWS partner; doctoral route via KTH TECoSA (Prof. Törngren).</a:t>
             </a:r>
           </a:p>
           <a:p>
@@ -6610,7 +6610,7 @@
                 </a:solidFill>
                 <a:latin typeface="Arial"/>
               </a:rPr>
-              <a:t> (safety assurance) · </a:t>
+              <a:t> (safety assurance + Risto's doctoral route) · </a:t>
             </a:r>
             <a:r>
               <a:rPr sz="2000" b="1" i="0">
